--- a/assets/fiches/A4-fiche-complet.pptx
+++ b/assets/fiches/A4-fiche-complet.pptx
@@ -3722,7 +3722,7 @@
                 </a:solidFill>
                 <a:latin typeface="Arial"/>
               </a:rPr>
-              <a:t>. Voici les grandes étapes que nous allons explorer ensemble aujourd'hui. Chaque thème est p…</a:t>
+              <a:t>. Voici les grandes étapes que nous allons explorer ensemble aujourd'hui. Chaque thème est pensé pour vous donner confiance et autonomie dans votre vie numérique quotidienne.</a:t>
             </a:r>
           </a:p>
         </p:txBody>
@@ -3969,7 +3969,7 @@
                 </a:solidFill>
                 <a:latin typeface="Arial"/>
               </a:rPr>
-              <a:t>. Une application (ou « app ») est un petit programme que vous installez sur votre smartphon…</a:t>
+              <a:t>. Une application (ou « app ») est un petit programme que vous installez sur votre smartphone pour accomplir une tâche précise. Comme les outils dans une boîte à outils : chaque app a sa fonction.</a:t>
             </a:r>
           </a:p>
         </p:txBody>
@@ -4216,7 +4216,7 @@
                 </a:solidFill>
                 <a:latin typeface="Arial"/>
               </a:rPr>
-              <a:t>. Selon votre téléphone, vous accédez à une boutique officielle différente. C'est là que vou…</a:t>
+              <a:t>. Selon votre téléphone, vous accédez à une boutique officielle différente. C'est là que vous trouverez toutes les applications vérifiées et sécurisées.</a:t>
             </a:r>
           </a:p>
         </p:txBody>
@@ -4463,7 +4463,7 @@
                 </a:solidFill>
                 <a:latin typeface="Arial"/>
               </a:rPr>
-              <a:t>. Avant de télécharger, prenez le temps de chercher et de comparer. Une bonne application es…</a:t>
+              <a:t>. Avant de télécharger, prenez le temps de chercher et de comparer. Une bonne application est celle qui correspond vraiment à votre besoin — pas forcément la première qui apparaît.</a:t>
             </a:r>
           </a:p>
         </p:txBody>
@@ -4710,7 +4710,7 @@
                 </a:solidFill>
                 <a:latin typeface="Arial"/>
               </a:rPr>
-              <a:t>. Le processus est identique sur iOS et Android. Sur iPhone, le bouton s'appelle « Obtenir »…</a:t>
+              <a:t>. Le processus est identique sur iOS et Android. Sur iPhone, le bouton s'appelle « Obtenir » pour les apps gratuites et affiche le prix pour les apps payantes. Sur Android, le bouton s'appelle « Installer ». Une fois téléchargée, l'icône apparaît automatiquement sur votre écran d'accueil.</a:t>
             </a:r>
           </a:p>
         </p:txBody>
@@ -4957,7 +4957,7 @@
                 </a:solidFill>
                 <a:latin typeface="Arial"/>
               </a:rPr>
-              <a:t>. Au fil du temps, les applications s'accumulent et l'écran d'accueil devient difficile à li…</a:t>
+              <a:t>. Au fil du temps, les applications s'accumulent et l'écran d'accueil devient difficile à lire. Voici comment garder un téléphone bien rangé et agréable à utiliser.</a:t>
             </a:r>
           </a:p>
         </p:txBody>
@@ -5204,7 +5204,7 @@
                 </a:solidFill>
                 <a:latin typeface="Arial"/>
               </a:rPr>
-              <a:t>. Une mise à jour, c'est comme une révision de voiture : elle corrige les problèmes, amélior…</a:t>
+              <a:t>. Une mise à jour, c'est comme une révision de voiture : elle corrige les problèmes, améliore les performances et renforce la sécurité. Ne les ignorez pas !</a:t>
             </a:r>
           </a:p>
         </p:txBody>
@@ -5451,7 +5451,7 @@
                 </a:solidFill>
                 <a:latin typeface="Arial"/>
               </a:rPr>
-              <a:t>. Supprimer des applications inutilisées est une excellente habitude : cela libère de l'espa…</a:t>
+              <a:t>. Supprimer des applications inutilisées est une excellente habitude : cela libère de l'espace, améliore les performances de votre téléphone et renforce votre vie privée.</a:t>
             </a:r>
           </a:p>
         </p:txBody>
@@ -5698,7 +5698,7 @@
                 </a:solidFill>
                 <a:latin typeface="Arial"/>
               </a:rPr>
-              <a:t>. Les applications, photos et vidéos prennent de la place. Quand le téléphone est plein, il …</a:t>
+              <a:t>. Les applications, photos et vidéos prennent de la place. Quand le téléphone est plein, il ralentit et ne peut plus recevoir de mises à jour. Voici comment surveiller et optimiser l'espace disponible.</a:t>
             </a:r>
           </a:p>
         </p:txBody>
@@ -5971,7 +5971,7 @@
                 </a:solidFill>
                 <a:latin typeface="Arial"/>
               </a:rPr>
-              <a:t>. Quand vous installez une application, elle peut vous demander d'accéder à certaines foncti…</a:t>
+              <a:t>. Quand vous installez une application, elle peut vous demander d'accéder à certaines fonctions de votre téléphone. Vous avez toujours le choix d'accepter ou refuser.</a:t>
             </a:r>
           </a:p>
         </p:txBody>
@@ -6218,7 +6218,7 @@
                 </a:solidFill>
                 <a:latin typeface="Arial"/>
               </a:rPr>
-              <a:t>. Comprendre les modèles économiques des applications vous évitera les mauvaises surprises s…</a:t>
+              <a:t>. Comprendre les modèles économiques des applications vous évitera les mauvaises surprises sur votre facture. Voici un tour d'horizon clair.</a:t>
             </a:r>
           </a:p>
         </p:txBody>
@@ -6465,7 +6465,7 @@
                 </a:solidFill>
                 <a:latin typeface="Arial"/>
               </a:rPr>
-              <a:t>. Certaines applications continuent de fonctionner même quand vous ne les utilisez pas, cons…</a:t>
+              <a:t>. Certaines applications continuent de fonctionner même quand vous ne les utilisez pas, consommant batterie et données mobiles. Apprenez à les contrôler.</a:t>
             </a:r>
           </a:p>
         </p:txBody>
@@ -6712,7 +6712,7 @@
                 </a:solidFill>
                 <a:latin typeface="Arial"/>
               </a:rPr>
-              <a:t>. Le numérique a une empreinte carbone réelle. Chaque téléchargement, chaque mise à jour, ch…</a:t>
+              <a:t>. Le numérique a une empreinte carbone réelle. Chaque téléchargement, chaque mise à jour, chaque heure de streaming consomme de l'énergie dans des centres de données. Voici des comparaisons concrètes pour mieux visualiser l'impact.</a:t>
             </a:r>
           </a:p>
         </p:txBody>
@@ -6959,7 +6959,7 @@
                 </a:solidFill>
                 <a:latin typeface="Arial"/>
               </a:rPr>
-              <a:t>. Voici un résumé pratique de tout ce que nous avons vu ensemble. Ces habitudes simples vous…</a:t>
+              <a:t>. Voici un résumé pratique de tout ce que nous avons vu ensemble. Ces habitudes simples vous permettront de gérer vos applications sereinement et en toute sécurité.</a:t>
             </a:r>
           </a:p>
         </p:txBody>

--- a/assets/fiches/A4-fiche-complet.pptx
+++ b/assets/fiches/A4-fiche-complet.pptx
@@ -3097,9 +3097,35 @@
         <p:nvPr/>
       </p:nvGrpSpPr>
       <p:grpSpPr/>
-      <p:sp>
-        <p:nvSpPr>
-          <p:cNvPr id="2" name="TextBox 1"/>
+      <p:pic>
+        <p:nvPicPr>
+          <p:cNvPr id="2" name="Picture 1" descr="bg-p1.png"/>
+          <p:cNvPicPr>
+            <a:picLocks noChangeAspect="1"/>
+          </p:cNvPicPr>
+          <p:nvPr/>
+        </p:nvPicPr>
+        <p:blipFill>
+          <a:blip r:embed="rId2">
+            <a:alphaModFix amt="80000"/>
+          </a:blip>
+          <a:stretch>
+            <a:fillRect/>
+          </a:stretch>
+        </p:blipFill>
+        <p:spPr>
+          <a:xfrm>
+            <a:off x="0" y="0"/>
+            <a:ext cx="7556399" cy="10692000"/>
+          </a:xfrm>
+          <a:prstGeom prst="rect">
+            <a:avLst/>
+          </a:prstGeom>
+        </p:spPr>
+      </p:pic>
+      <p:sp>
+        <p:nvSpPr>
+          <p:cNvPr id="3" name="TextBox 2"/>
           <p:cNvSpPr txBox="1"/>
           <p:nvPr/>
         </p:nvSpPr>
@@ -3160,7 +3186,7 @@
       </p:sp>
       <p:sp>
         <p:nvSpPr>
-          <p:cNvPr id="3" name="Rectangle 2"/>
+          <p:cNvPr id="4" name="Rectangle 3"/>
           <p:cNvSpPr/>
           <p:nvPr/>
         </p:nvSpPr>
@@ -3203,7 +3229,7 @@
       </p:sp>
       <p:sp>
         <p:nvSpPr>
-          <p:cNvPr id="4" name="TextBox 3"/>
+          <p:cNvPr id="5" name="TextBox 4"/>
           <p:cNvSpPr txBox="1"/>
           <p:nvPr/>
         </p:nvSpPr>
@@ -3321,7 +3347,7 @@
       </p:sp>
       <p:sp>
         <p:nvSpPr>
-          <p:cNvPr id="5" name="Rectangle 4"/>
+          <p:cNvPr id="6" name="Rectangle 5"/>
           <p:cNvSpPr/>
           <p:nvPr/>
         </p:nvSpPr>
@@ -3364,7 +3390,7 @@
       </p:sp>
       <p:sp>
         <p:nvSpPr>
-          <p:cNvPr id="6" name="TextBox 5"/>
+          <p:cNvPr id="7" name="TextBox 6"/>
           <p:cNvSpPr txBox="1"/>
           <p:nvPr/>
         </p:nvSpPr>
@@ -3482,7 +3508,7 @@
       </p:sp>
       <p:sp>
         <p:nvSpPr>
-          <p:cNvPr id="7" name="Rectangle 6"/>
+          <p:cNvPr id="8" name="Rectangle 7"/>
           <p:cNvSpPr/>
           <p:nvPr/>
         </p:nvSpPr>
@@ -3525,7 +3551,7 @@
       </p:sp>
       <p:sp>
         <p:nvSpPr>
-          <p:cNvPr id="8" name="Rectangle 7"/>
+          <p:cNvPr id="9" name="Rectangle 8"/>
           <p:cNvSpPr/>
           <p:nvPr/>
         </p:nvSpPr>
@@ -3566,7 +3592,7 @@
       </p:sp>
       <p:sp>
         <p:nvSpPr>
-          <p:cNvPr id="9" name="Rectangle 8"/>
+          <p:cNvPr id="10" name="Rectangle 9"/>
           <p:cNvSpPr/>
           <p:nvPr/>
         </p:nvSpPr>
@@ -3607,7 +3633,7 @@
       </p:sp>
       <p:sp>
         <p:nvSpPr>
-          <p:cNvPr id="10" name="TextBox 9"/>
+          <p:cNvPr id="11" name="TextBox 10"/>
           <p:cNvSpPr txBox="1"/>
           <p:nvPr/>
         </p:nvSpPr>
@@ -3649,7 +3675,7 @@
       </p:sp>
       <p:sp>
         <p:nvSpPr>
-          <p:cNvPr id="11" name="TextBox 10"/>
+          <p:cNvPr id="12" name="TextBox 11"/>
           <p:cNvSpPr txBox="1"/>
           <p:nvPr/>
         </p:nvSpPr>
@@ -3729,7 +3755,7 @@
       </p:sp>
       <p:sp>
         <p:nvSpPr>
-          <p:cNvPr id="12" name="Rectangle 11"/>
+          <p:cNvPr id="13" name="Rectangle 12"/>
           <p:cNvSpPr/>
           <p:nvPr/>
         </p:nvSpPr>
@@ -3772,7 +3798,7 @@
       </p:sp>
       <p:sp>
         <p:nvSpPr>
-          <p:cNvPr id="13" name="Rectangle 12"/>
+          <p:cNvPr id="14" name="Rectangle 13"/>
           <p:cNvSpPr/>
           <p:nvPr/>
         </p:nvSpPr>
@@ -3813,7 +3839,7 @@
       </p:sp>
       <p:sp>
         <p:nvSpPr>
-          <p:cNvPr id="14" name="Rectangle 13"/>
+          <p:cNvPr id="15" name="Rectangle 14"/>
           <p:cNvSpPr/>
           <p:nvPr/>
         </p:nvSpPr>
@@ -3854,7 +3880,7 @@
       </p:sp>
       <p:sp>
         <p:nvSpPr>
-          <p:cNvPr id="15" name="TextBox 14"/>
+          <p:cNvPr id="16" name="TextBox 15"/>
           <p:cNvSpPr txBox="1"/>
           <p:nvPr/>
         </p:nvSpPr>
@@ -3896,7 +3922,7 @@
       </p:sp>
       <p:sp>
         <p:nvSpPr>
-          <p:cNvPr id="16" name="TextBox 15"/>
+          <p:cNvPr id="17" name="TextBox 16"/>
           <p:cNvSpPr txBox="1"/>
           <p:nvPr/>
         </p:nvSpPr>
@@ -3976,7 +4002,7 @@
       </p:sp>
       <p:sp>
         <p:nvSpPr>
-          <p:cNvPr id="17" name="Rectangle 16"/>
+          <p:cNvPr id="18" name="Rectangle 17"/>
           <p:cNvSpPr/>
           <p:nvPr/>
         </p:nvSpPr>
@@ -4019,7 +4045,7 @@
       </p:sp>
       <p:sp>
         <p:nvSpPr>
-          <p:cNvPr id="18" name="Rectangle 17"/>
+          <p:cNvPr id="19" name="Rectangle 18"/>
           <p:cNvSpPr/>
           <p:nvPr/>
         </p:nvSpPr>
@@ -4060,7 +4086,7 @@
       </p:sp>
       <p:sp>
         <p:nvSpPr>
-          <p:cNvPr id="19" name="Rectangle 18"/>
+          <p:cNvPr id="20" name="Rectangle 19"/>
           <p:cNvSpPr/>
           <p:nvPr/>
         </p:nvSpPr>
@@ -4101,7 +4127,7 @@
       </p:sp>
       <p:sp>
         <p:nvSpPr>
-          <p:cNvPr id="20" name="TextBox 19"/>
+          <p:cNvPr id="21" name="TextBox 20"/>
           <p:cNvSpPr txBox="1"/>
           <p:nvPr/>
         </p:nvSpPr>
@@ -4143,7 +4169,7 @@
       </p:sp>
       <p:sp>
         <p:nvSpPr>
-          <p:cNvPr id="21" name="TextBox 20"/>
+          <p:cNvPr id="22" name="TextBox 21"/>
           <p:cNvSpPr txBox="1"/>
           <p:nvPr/>
         </p:nvSpPr>
@@ -4223,7 +4249,7 @@
       </p:sp>
       <p:sp>
         <p:nvSpPr>
-          <p:cNvPr id="22" name="Rectangle 21"/>
+          <p:cNvPr id="23" name="Rectangle 22"/>
           <p:cNvSpPr/>
           <p:nvPr/>
         </p:nvSpPr>
@@ -4266,7 +4292,7 @@
       </p:sp>
       <p:sp>
         <p:nvSpPr>
-          <p:cNvPr id="23" name="Rectangle 22"/>
+          <p:cNvPr id="24" name="Rectangle 23"/>
           <p:cNvSpPr/>
           <p:nvPr/>
         </p:nvSpPr>
@@ -4307,7 +4333,7 @@
       </p:sp>
       <p:sp>
         <p:nvSpPr>
-          <p:cNvPr id="24" name="Rectangle 23"/>
+          <p:cNvPr id="25" name="Rectangle 24"/>
           <p:cNvSpPr/>
           <p:nvPr/>
         </p:nvSpPr>
@@ -4348,7 +4374,7 @@
       </p:sp>
       <p:sp>
         <p:nvSpPr>
-          <p:cNvPr id="25" name="TextBox 24"/>
+          <p:cNvPr id="26" name="TextBox 25"/>
           <p:cNvSpPr txBox="1"/>
           <p:nvPr/>
         </p:nvSpPr>
@@ -4390,7 +4416,7 @@
       </p:sp>
       <p:sp>
         <p:nvSpPr>
-          <p:cNvPr id="26" name="TextBox 25"/>
+          <p:cNvPr id="27" name="TextBox 26"/>
           <p:cNvSpPr txBox="1"/>
           <p:nvPr/>
         </p:nvSpPr>
@@ -4470,7 +4496,7 @@
       </p:sp>
       <p:sp>
         <p:nvSpPr>
-          <p:cNvPr id="27" name="Rectangle 26"/>
+          <p:cNvPr id="28" name="Rectangle 27"/>
           <p:cNvSpPr/>
           <p:nvPr/>
         </p:nvSpPr>
@@ -4513,7 +4539,7 @@
       </p:sp>
       <p:sp>
         <p:nvSpPr>
-          <p:cNvPr id="28" name="Rectangle 27"/>
+          <p:cNvPr id="29" name="Rectangle 28"/>
           <p:cNvSpPr/>
           <p:nvPr/>
         </p:nvSpPr>
@@ -4554,7 +4580,7 @@
       </p:sp>
       <p:sp>
         <p:nvSpPr>
-          <p:cNvPr id="29" name="Rectangle 28"/>
+          <p:cNvPr id="30" name="Rectangle 29"/>
           <p:cNvSpPr/>
           <p:nvPr/>
         </p:nvSpPr>
@@ -4595,7 +4621,7 @@
       </p:sp>
       <p:sp>
         <p:nvSpPr>
-          <p:cNvPr id="30" name="TextBox 29"/>
+          <p:cNvPr id="31" name="TextBox 30"/>
           <p:cNvSpPr txBox="1"/>
           <p:nvPr/>
         </p:nvSpPr>
@@ -4637,7 +4663,7 @@
       </p:sp>
       <p:sp>
         <p:nvSpPr>
-          <p:cNvPr id="31" name="TextBox 30"/>
+          <p:cNvPr id="32" name="TextBox 31"/>
           <p:cNvSpPr txBox="1"/>
           <p:nvPr/>
         </p:nvSpPr>
@@ -4717,7 +4743,7 @@
       </p:sp>
       <p:sp>
         <p:nvSpPr>
-          <p:cNvPr id="32" name="Rectangle 31"/>
+          <p:cNvPr id="33" name="Rectangle 32"/>
           <p:cNvSpPr/>
           <p:nvPr/>
         </p:nvSpPr>
@@ -4760,7 +4786,7 @@
       </p:sp>
       <p:sp>
         <p:nvSpPr>
-          <p:cNvPr id="33" name="Rectangle 32"/>
+          <p:cNvPr id="34" name="Rectangle 33"/>
           <p:cNvSpPr/>
           <p:nvPr/>
         </p:nvSpPr>
@@ -4801,7 +4827,7 @@
       </p:sp>
       <p:sp>
         <p:nvSpPr>
-          <p:cNvPr id="34" name="Rectangle 33"/>
+          <p:cNvPr id="35" name="Rectangle 34"/>
           <p:cNvSpPr/>
           <p:nvPr/>
         </p:nvSpPr>
@@ -4842,7 +4868,7 @@
       </p:sp>
       <p:sp>
         <p:nvSpPr>
-          <p:cNvPr id="35" name="TextBox 34"/>
+          <p:cNvPr id="36" name="TextBox 35"/>
           <p:cNvSpPr txBox="1"/>
           <p:nvPr/>
         </p:nvSpPr>
@@ -4884,7 +4910,7 @@
       </p:sp>
       <p:sp>
         <p:nvSpPr>
-          <p:cNvPr id="36" name="TextBox 35"/>
+          <p:cNvPr id="37" name="TextBox 36"/>
           <p:cNvSpPr txBox="1"/>
           <p:nvPr/>
         </p:nvSpPr>
@@ -4964,7 +4990,7 @@
       </p:sp>
       <p:sp>
         <p:nvSpPr>
-          <p:cNvPr id="37" name="Rectangle 36"/>
+          <p:cNvPr id="38" name="Rectangle 37"/>
           <p:cNvSpPr/>
           <p:nvPr/>
         </p:nvSpPr>
@@ -5007,7 +5033,7 @@
       </p:sp>
       <p:sp>
         <p:nvSpPr>
-          <p:cNvPr id="38" name="Rectangle 37"/>
+          <p:cNvPr id="39" name="Rectangle 38"/>
           <p:cNvSpPr/>
           <p:nvPr/>
         </p:nvSpPr>
@@ -5048,7 +5074,7 @@
       </p:sp>
       <p:sp>
         <p:nvSpPr>
-          <p:cNvPr id="39" name="Rectangle 38"/>
+          <p:cNvPr id="40" name="Rectangle 39"/>
           <p:cNvSpPr/>
           <p:nvPr/>
         </p:nvSpPr>
@@ -5089,7 +5115,7 @@
       </p:sp>
       <p:sp>
         <p:nvSpPr>
-          <p:cNvPr id="40" name="TextBox 39"/>
+          <p:cNvPr id="41" name="TextBox 40"/>
           <p:cNvSpPr txBox="1"/>
           <p:nvPr/>
         </p:nvSpPr>
@@ -5131,7 +5157,7 @@
       </p:sp>
       <p:sp>
         <p:nvSpPr>
-          <p:cNvPr id="41" name="TextBox 40"/>
+          <p:cNvPr id="42" name="TextBox 41"/>
           <p:cNvSpPr txBox="1"/>
           <p:nvPr/>
         </p:nvSpPr>
@@ -5211,7 +5237,7 @@
       </p:sp>
       <p:sp>
         <p:nvSpPr>
-          <p:cNvPr id="42" name="Rectangle 41"/>
+          <p:cNvPr id="43" name="Rectangle 42"/>
           <p:cNvSpPr/>
           <p:nvPr/>
         </p:nvSpPr>
@@ -5254,7 +5280,7 @@
       </p:sp>
       <p:sp>
         <p:nvSpPr>
-          <p:cNvPr id="43" name="Rectangle 42"/>
+          <p:cNvPr id="44" name="Rectangle 43"/>
           <p:cNvSpPr/>
           <p:nvPr/>
         </p:nvSpPr>
@@ -5295,7 +5321,7 @@
       </p:sp>
       <p:sp>
         <p:nvSpPr>
-          <p:cNvPr id="44" name="Rectangle 43"/>
+          <p:cNvPr id="45" name="Rectangle 44"/>
           <p:cNvSpPr/>
           <p:nvPr/>
         </p:nvSpPr>
@@ -5336,7 +5362,7 @@
       </p:sp>
       <p:sp>
         <p:nvSpPr>
-          <p:cNvPr id="45" name="TextBox 44"/>
+          <p:cNvPr id="46" name="TextBox 45"/>
           <p:cNvSpPr txBox="1"/>
           <p:nvPr/>
         </p:nvSpPr>
@@ -5378,7 +5404,7 @@
       </p:sp>
       <p:sp>
         <p:nvSpPr>
-          <p:cNvPr id="46" name="TextBox 45"/>
+          <p:cNvPr id="47" name="TextBox 46"/>
           <p:cNvSpPr txBox="1"/>
           <p:nvPr/>
         </p:nvSpPr>
@@ -5458,7 +5484,7 @@
       </p:sp>
       <p:sp>
         <p:nvSpPr>
-          <p:cNvPr id="47" name="Rectangle 46"/>
+          <p:cNvPr id="48" name="Rectangle 47"/>
           <p:cNvSpPr/>
           <p:nvPr/>
         </p:nvSpPr>
@@ -5501,7 +5527,7 @@
       </p:sp>
       <p:sp>
         <p:nvSpPr>
-          <p:cNvPr id="48" name="Rectangle 47"/>
+          <p:cNvPr id="49" name="Rectangle 48"/>
           <p:cNvSpPr/>
           <p:nvPr/>
         </p:nvSpPr>
@@ -5542,7 +5568,7 @@
       </p:sp>
       <p:sp>
         <p:nvSpPr>
-          <p:cNvPr id="49" name="Rectangle 48"/>
+          <p:cNvPr id="50" name="Rectangle 49"/>
           <p:cNvSpPr/>
           <p:nvPr/>
         </p:nvSpPr>
@@ -5583,7 +5609,7 @@
       </p:sp>
       <p:sp>
         <p:nvSpPr>
-          <p:cNvPr id="50" name="TextBox 49"/>
+          <p:cNvPr id="51" name="TextBox 50"/>
           <p:cNvSpPr txBox="1"/>
           <p:nvPr/>
         </p:nvSpPr>
@@ -5625,7 +5651,7 @@
       </p:sp>
       <p:sp>
         <p:nvSpPr>
-          <p:cNvPr id="51" name="TextBox 50"/>
+          <p:cNvPr id="52" name="TextBox 51"/>
           <p:cNvSpPr txBox="1"/>
           <p:nvPr/>
         </p:nvSpPr>
@@ -5729,9 +5755,35 @@
         <p:nvPr/>
       </p:nvGrpSpPr>
       <p:grpSpPr/>
-      <p:sp>
-        <p:nvSpPr>
-          <p:cNvPr id="2" name="Rectangle 1"/>
+      <p:pic>
+        <p:nvPicPr>
+          <p:cNvPr id="2" name="Picture 1" descr="bg-p2.png"/>
+          <p:cNvPicPr>
+            <a:picLocks noChangeAspect="1"/>
+          </p:cNvPicPr>
+          <p:nvPr/>
+        </p:nvPicPr>
+        <p:blipFill>
+          <a:blip r:embed="rId2">
+            <a:alphaModFix amt="80000"/>
+          </a:blip>
+          <a:stretch>
+            <a:fillRect/>
+          </a:stretch>
+        </p:blipFill>
+        <p:spPr>
+          <a:xfrm>
+            <a:off x="0" y="0"/>
+            <a:ext cx="7556399" cy="10692000"/>
+          </a:xfrm>
+          <a:prstGeom prst="rect">
+            <a:avLst/>
+          </a:prstGeom>
+        </p:spPr>
+      </p:pic>
+      <p:sp>
+        <p:nvSpPr>
+          <p:cNvPr id="3" name="Rectangle 2"/>
           <p:cNvSpPr/>
           <p:nvPr/>
         </p:nvSpPr>
@@ -5774,7 +5826,7 @@
       </p:sp>
       <p:sp>
         <p:nvSpPr>
-          <p:cNvPr id="3" name="Rectangle 2"/>
+          <p:cNvPr id="4" name="Rectangle 3"/>
           <p:cNvSpPr/>
           <p:nvPr/>
         </p:nvSpPr>
@@ -5815,7 +5867,7 @@
       </p:sp>
       <p:sp>
         <p:nvSpPr>
-          <p:cNvPr id="4" name="Rectangle 3"/>
+          <p:cNvPr id="5" name="Rectangle 4"/>
           <p:cNvSpPr/>
           <p:nvPr/>
         </p:nvSpPr>
@@ -5856,7 +5908,7 @@
       </p:sp>
       <p:sp>
         <p:nvSpPr>
-          <p:cNvPr id="5" name="TextBox 4"/>
+          <p:cNvPr id="6" name="TextBox 5"/>
           <p:cNvSpPr txBox="1"/>
           <p:nvPr/>
         </p:nvSpPr>
@@ -5898,7 +5950,7 @@
       </p:sp>
       <p:sp>
         <p:nvSpPr>
-          <p:cNvPr id="6" name="TextBox 5"/>
+          <p:cNvPr id="7" name="TextBox 6"/>
           <p:cNvSpPr txBox="1"/>
           <p:nvPr/>
         </p:nvSpPr>
@@ -5978,7 +6030,7 @@
       </p:sp>
       <p:sp>
         <p:nvSpPr>
-          <p:cNvPr id="7" name="Rectangle 6"/>
+          <p:cNvPr id="8" name="Rectangle 7"/>
           <p:cNvSpPr/>
           <p:nvPr/>
         </p:nvSpPr>
@@ -6021,7 +6073,7 @@
       </p:sp>
       <p:sp>
         <p:nvSpPr>
-          <p:cNvPr id="8" name="Rectangle 7"/>
+          <p:cNvPr id="9" name="Rectangle 8"/>
           <p:cNvSpPr/>
           <p:nvPr/>
         </p:nvSpPr>
@@ -6062,7 +6114,7 @@
       </p:sp>
       <p:sp>
         <p:nvSpPr>
-          <p:cNvPr id="9" name="Rectangle 8"/>
+          <p:cNvPr id="10" name="Rectangle 9"/>
           <p:cNvSpPr/>
           <p:nvPr/>
         </p:nvSpPr>
@@ -6103,7 +6155,7 @@
       </p:sp>
       <p:sp>
         <p:nvSpPr>
-          <p:cNvPr id="10" name="TextBox 9"/>
+          <p:cNvPr id="11" name="TextBox 10"/>
           <p:cNvSpPr txBox="1"/>
           <p:nvPr/>
         </p:nvSpPr>
@@ -6145,7 +6197,7 @@
       </p:sp>
       <p:sp>
         <p:nvSpPr>
-          <p:cNvPr id="11" name="TextBox 10"/>
+          <p:cNvPr id="12" name="TextBox 11"/>
           <p:cNvSpPr txBox="1"/>
           <p:nvPr/>
         </p:nvSpPr>
@@ -6225,7 +6277,7 @@
       </p:sp>
       <p:sp>
         <p:nvSpPr>
-          <p:cNvPr id="12" name="Rectangle 11"/>
+          <p:cNvPr id="13" name="Rectangle 12"/>
           <p:cNvSpPr/>
           <p:nvPr/>
         </p:nvSpPr>
@@ -6268,7 +6320,7 @@
       </p:sp>
       <p:sp>
         <p:nvSpPr>
-          <p:cNvPr id="13" name="Rectangle 12"/>
+          <p:cNvPr id="14" name="Rectangle 13"/>
           <p:cNvSpPr/>
           <p:nvPr/>
         </p:nvSpPr>
@@ -6309,7 +6361,7 @@
       </p:sp>
       <p:sp>
         <p:nvSpPr>
-          <p:cNvPr id="14" name="Rectangle 13"/>
+          <p:cNvPr id="15" name="Rectangle 14"/>
           <p:cNvSpPr/>
           <p:nvPr/>
         </p:nvSpPr>
@@ -6350,7 +6402,7 @@
       </p:sp>
       <p:sp>
         <p:nvSpPr>
-          <p:cNvPr id="15" name="TextBox 14"/>
+          <p:cNvPr id="16" name="TextBox 15"/>
           <p:cNvSpPr txBox="1"/>
           <p:nvPr/>
         </p:nvSpPr>
@@ -6392,7 +6444,7 @@
       </p:sp>
       <p:sp>
         <p:nvSpPr>
-          <p:cNvPr id="16" name="TextBox 15"/>
+          <p:cNvPr id="17" name="TextBox 16"/>
           <p:cNvSpPr txBox="1"/>
           <p:nvPr/>
         </p:nvSpPr>
@@ -6472,7 +6524,7 @@
       </p:sp>
       <p:sp>
         <p:nvSpPr>
-          <p:cNvPr id="17" name="Rectangle 16"/>
+          <p:cNvPr id="18" name="Rectangle 17"/>
           <p:cNvSpPr/>
           <p:nvPr/>
         </p:nvSpPr>
@@ -6515,7 +6567,7 @@
       </p:sp>
       <p:sp>
         <p:nvSpPr>
-          <p:cNvPr id="18" name="Rectangle 17"/>
+          <p:cNvPr id="19" name="Rectangle 18"/>
           <p:cNvSpPr/>
           <p:nvPr/>
         </p:nvSpPr>
@@ -6556,7 +6608,7 @@
       </p:sp>
       <p:sp>
         <p:nvSpPr>
-          <p:cNvPr id="19" name="Rectangle 18"/>
+          <p:cNvPr id="20" name="Rectangle 19"/>
           <p:cNvSpPr/>
           <p:nvPr/>
         </p:nvSpPr>
@@ -6597,7 +6649,7 @@
       </p:sp>
       <p:sp>
         <p:nvSpPr>
-          <p:cNvPr id="20" name="TextBox 19"/>
+          <p:cNvPr id="21" name="TextBox 20"/>
           <p:cNvSpPr txBox="1"/>
           <p:nvPr/>
         </p:nvSpPr>
@@ -6639,7 +6691,7 @@
       </p:sp>
       <p:sp>
         <p:nvSpPr>
-          <p:cNvPr id="21" name="TextBox 20"/>
+          <p:cNvPr id="22" name="TextBox 21"/>
           <p:cNvSpPr txBox="1"/>
           <p:nvPr/>
         </p:nvSpPr>
@@ -6719,7 +6771,7 @@
       </p:sp>
       <p:sp>
         <p:nvSpPr>
-          <p:cNvPr id="22" name="Rectangle 21"/>
+          <p:cNvPr id="23" name="Rectangle 22"/>
           <p:cNvSpPr/>
           <p:nvPr/>
         </p:nvSpPr>
@@ -6762,7 +6814,7 @@
       </p:sp>
       <p:sp>
         <p:nvSpPr>
-          <p:cNvPr id="23" name="Rectangle 22"/>
+          <p:cNvPr id="24" name="Rectangle 23"/>
           <p:cNvSpPr/>
           <p:nvPr/>
         </p:nvSpPr>
@@ -6803,7 +6855,7 @@
       </p:sp>
       <p:sp>
         <p:nvSpPr>
-          <p:cNvPr id="24" name="Rectangle 23"/>
+          <p:cNvPr id="25" name="Rectangle 24"/>
           <p:cNvSpPr/>
           <p:nvPr/>
         </p:nvSpPr>
@@ -6844,7 +6896,7 @@
       </p:sp>
       <p:sp>
         <p:nvSpPr>
-          <p:cNvPr id="25" name="TextBox 24"/>
+          <p:cNvPr id="26" name="TextBox 25"/>
           <p:cNvSpPr txBox="1"/>
           <p:nvPr/>
         </p:nvSpPr>
@@ -6886,7 +6938,7 @@
       </p:sp>
       <p:sp>
         <p:nvSpPr>
-          <p:cNvPr id="26" name="TextBox 25"/>
+          <p:cNvPr id="27" name="TextBox 26"/>
           <p:cNvSpPr txBox="1"/>
           <p:nvPr/>
         </p:nvSpPr>
@@ -6966,7 +7018,7 @@
       </p:sp>
       <p:sp>
         <p:nvSpPr>
-          <p:cNvPr id="27" name="Rectangle 26"/>
+          <p:cNvPr id="28" name="Rectangle 27"/>
           <p:cNvSpPr/>
           <p:nvPr/>
         </p:nvSpPr>
@@ -7007,7 +7059,7 @@
       </p:sp>
       <p:sp>
         <p:nvSpPr>
-          <p:cNvPr id="28" name="TextBox 27"/>
+          <p:cNvPr id="29" name="TextBox 28"/>
           <p:cNvSpPr txBox="1"/>
           <p:nvPr/>
         </p:nvSpPr>

--- a/assets/fiches/A4-fiche-complet.pptx
+++ b/assets/fiches/A4-fiche-complet.pptx
@@ -3084,9 +3084,12 @@
   <p:cSld>
     <p:bg>
       <p:bgPr>
-        <a:solidFill>
-          <a:srgbClr val="FFFFFF"/>
-        </a:solidFill>
+        <a:blipFill>
+          <a:blip r:embed="rId2"/>
+          <a:stretch>
+            <a:fillRect/>
+          </a:stretch>
+        </a:blipFill>
         <a:effectLst/>
       </p:bgPr>
     </p:bg>
@@ -3097,35 +3100,9 @@
         <p:nvPr/>
       </p:nvGrpSpPr>
       <p:grpSpPr/>
-      <p:pic>
-        <p:nvPicPr>
-          <p:cNvPr id="2" name="Picture 1" descr="bg-p1.png"/>
-          <p:cNvPicPr>
-            <a:picLocks noChangeAspect="1"/>
-          </p:cNvPicPr>
-          <p:nvPr/>
-        </p:nvPicPr>
-        <p:blipFill>
-          <a:blip r:embed="rId2">
-            <a:alphaModFix amt="80000"/>
-          </a:blip>
-          <a:stretch>
-            <a:fillRect/>
-          </a:stretch>
-        </p:blipFill>
-        <p:spPr>
-          <a:xfrm>
-            <a:off x="0" y="0"/>
-            <a:ext cx="7556399" cy="10692000"/>
-          </a:xfrm>
-          <a:prstGeom prst="rect">
-            <a:avLst/>
-          </a:prstGeom>
-        </p:spPr>
-      </p:pic>
-      <p:sp>
-        <p:nvSpPr>
-          <p:cNvPr id="3" name="TextBox 2"/>
+      <p:sp>
+        <p:nvSpPr>
+          <p:cNvPr id="2" name="TextBox 1"/>
           <p:cNvSpPr txBox="1"/>
           <p:nvPr/>
         </p:nvSpPr>
@@ -3186,7 +3163,7 @@
       </p:sp>
       <p:sp>
         <p:nvSpPr>
-          <p:cNvPr id="4" name="Rectangle 3"/>
+          <p:cNvPr id="3" name="Rectangle 2"/>
           <p:cNvSpPr/>
           <p:nvPr/>
         </p:nvSpPr>
@@ -3229,7 +3206,7 @@
       </p:sp>
       <p:sp>
         <p:nvSpPr>
-          <p:cNvPr id="5" name="TextBox 4"/>
+          <p:cNvPr id="4" name="TextBox 3"/>
           <p:cNvSpPr txBox="1"/>
           <p:nvPr/>
         </p:nvSpPr>
@@ -3347,7 +3324,7 @@
       </p:sp>
       <p:sp>
         <p:nvSpPr>
-          <p:cNvPr id="6" name="Rectangle 5"/>
+          <p:cNvPr id="5" name="Rectangle 4"/>
           <p:cNvSpPr/>
           <p:nvPr/>
         </p:nvSpPr>
@@ -3390,7 +3367,7 @@
       </p:sp>
       <p:sp>
         <p:nvSpPr>
-          <p:cNvPr id="7" name="TextBox 6"/>
+          <p:cNvPr id="6" name="TextBox 5"/>
           <p:cNvSpPr txBox="1"/>
           <p:nvPr/>
         </p:nvSpPr>
@@ -3508,7 +3485,7 @@
       </p:sp>
       <p:sp>
         <p:nvSpPr>
-          <p:cNvPr id="8" name="Rectangle 7"/>
+          <p:cNvPr id="7" name="Rectangle 6"/>
           <p:cNvSpPr/>
           <p:nvPr/>
         </p:nvSpPr>
@@ -3551,7 +3528,7 @@
       </p:sp>
       <p:sp>
         <p:nvSpPr>
-          <p:cNvPr id="9" name="Rectangle 8"/>
+          <p:cNvPr id="8" name="Rectangle 7"/>
           <p:cNvSpPr/>
           <p:nvPr/>
         </p:nvSpPr>
@@ -3592,7 +3569,7 @@
       </p:sp>
       <p:sp>
         <p:nvSpPr>
-          <p:cNvPr id="10" name="Rectangle 9"/>
+          <p:cNvPr id="9" name="Rectangle 8"/>
           <p:cNvSpPr/>
           <p:nvPr/>
         </p:nvSpPr>
@@ -3633,7 +3610,7 @@
       </p:sp>
       <p:sp>
         <p:nvSpPr>
-          <p:cNvPr id="11" name="TextBox 10"/>
+          <p:cNvPr id="10" name="TextBox 9"/>
           <p:cNvSpPr txBox="1"/>
           <p:nvPr/>
         </p:nvSpPr>
@@ -3675,7 +3652,7 @@
       </p:sp>
       <p:sp>
         <p:nvSpPr>
-          <p:cNvPr id="12" name="TextBox 11"/>
+          <p:cNvPr id="11" name="TextBox 10"/>
           <p:cNvSpPr txBox="1"/>
           <p:nvPr/>
         </p:nvSpPr>
@@ -3755,7 +3732,7 @@
       </p:sp>
       <p:sp>
         <p:nvSpPr>
-          <p:cNvPr id="13" name="Rectangle 12"/>
+          <p:cNvPr id="12" name="Rectangle 11"/>
           <p:cNvSpPr/>
           <p:nvPr/>
         </p:nvSpPr>
@@ -3798,7 +3775,7 @@
       </p:sp>
       <p:sp>
         <p:nvSpPr>
-          <p:cNvPr id="14" name="Rectangle 13"/>
+          <p:cNvPr id="13" name="Rectangle 12"/>
           <p:cNvSpPr/>
           <p:nvPr/>
         </p:nvSpPr>
@@ -3839,7 +3816,7 @@
       </p:sp>
       <p:sp>
         <p:nvSpPr>
-          <p:cNvPr id="15" name="Rectangle 14"/>
+          <p:cNvPr id="14" name="Rectangle 13"/>
           <p:cNvSpPr/>
           <p:nvPr/>
         </p:nvSpPr>
@@ -3880,7 +3857,7 @@
       </p:sp>
       <p:sp>
         <p:nvSpPr>
-          <p:cNvPr id="16" name="TextBox 15"/>
+          <p:cNvPr id="15" name="TextBox 14"/>
           <p:cNvSpPr txBox="1"/>
           <p:nvPr/>
         </p:nvSpPr>
@@ -3922,7 +3899,7 @@
       </p:sp>
       <p:sp>
         <p:nvSpPr>
-          <p:cNvPr id="17" name="TextBox 16"/>
+          <p:cNvPr id="16" name="TextBox 15"/>
           <p:cNvSpPr txBox="1"/>
           <p:nvPr/>
         </p:nvSpPr>
@@ -4002,7 +3979,7 @@
       </p:sp>
       <p:sp>
         <p:nvSpPr>
-          <p:cNvPr id="18" name="Rectangle 17"/>
+          <p:cNvPr id="17" name="Rectangle 16"/>
           <p:cNvSpPr/>
           <p:nvPr/>
         </p:nvSpPr>
@@ -4045,7 +4022,7 @@
       </p:sp>
       <p:sp>
         <p:nvSpPr>
-          <p:cNvPr id="19" name="Rectangle 18"/>
+          <p:cNvPr id="18" name="Rectangle 17"/>
           <p:cNvSpPr/>
           <p:nvPr/>
         </p:nvSpPr>
@@ -4086,7 +4063,7 @@
       </p:sp>
       <p:sp>
         <p:nvSpPr>
-          <p:cNvPr id="20" name="Rectangle 19"/>
+          <p:cNvPr id="19" name="Rectangle 18"/>
           <p:cNvSpPr/>
           <p:nvPr/>
         </p:nvSpPr>
@@ -4127,7 +4104,7 @@
       </p:sp>
       <p:sp>
         <p:nvSpPr>
-          <p:cNvPr id="21" name="TextBox 20"/>
+          <p:cNvPr id="20" name="TextBox 19"/>
           <p:cNvSpPr txBox="1"/>
           <p:nvPr/>
         </p:nvSpPr>
@@ -4169,7 +4146,7 @@
       </p:sp>
       <p:sp>
         <p:nvSpPr>
-          <p:cNvPr id="22" name="TextBox 21"/>
+          <p:cNvPr id="21" name="TextBox 20"/>
           <p:cNvSpPr txBox="1"/>
           <p:nvPr/>
         </p:nvSpPr>
@@ -4249,7 +4226,7 @@
       </p:sp>
       <p:sp>
         <p:nvSpPr>
-          <p:cNvPr id="23" name="Rectangle 22"/>
+          <p:cNvPr id="22" name="Rectangle 21"/>
           <p:cNvSpPr/>
           <p:nvPr/>
         </p:nvSpPr>
@@ -4292,7 +4269,7 @@
       </p:sp>
       <p:sp>
         <p:nvSpPr>
-          <p:cNvPr id="24" name="Rectangle 23"/>
+          <p:cNvPr id="23" name="Rectangle 22"/>
           <p:cNvSpPr/>
           <p:nvPr/>
         </p:nvSpPr>
@@ -4333,7 +4310,7 @@
       </p:sp>
       <p:sp>
         <p:nvSpPr>
-          <p:cNvPr id="25" name="Rectangle 24"/>
+          <p:cNvPr id="24" name="Rectangle 23"/>
           <p:cNvSpPr/>
           <p:nvPr/>
         </p:nvSpPr>
@@ -4374,7 +4351,7 @@
       </p:sp>
       <p:sp>
         <p:nvSpPr>
-          <p:cNvPr id="26" name="TextBox 25"/>
+          <p:cNvPr id="25" name="TextBox 24"/>
           <p:cNvSpPr txBox="1"/>
           <p:nvPr/>
         </p:nvSpPr>
@@ -4416,7 +4393,7 @@
       </p:sp>
       <p:sp>
         <p:nvSpPr>
-          <p:cNvPr id="27" name="TextBox 26"/>
+          <p:cNvPr id="26" name="TextBox 25"/>
           <p:cNvSpPr txBox="1"/>
           <p:nvPr/>
         </p:nvSpPr>
@@ -4496,7 +4473,7 @@
       </p:sp>
       <p:sp>
         <p:nvSpPr>
-          <p:cNvPr id="28" name="Rectangle 27"/>
+          <p:cNvPr id="27" name="Rectangle 26"/>
           <p:cNvSpPr/>
           <p:nvPr/>
         </p:nvSpPr>
@@ -4539,7 +4516,7 @@
       </p:sp>
       <p:sp>
         <p:nvSpPr>
-          <p:cNvPr id="29" name="Rectangle 28"/>
+          <p:cNvPr id="28" name="Rectangle 27"/>
           <p:cNvSpPr/>
           <p:nvPr/>
         </p:nvSpPr>
@@ -4580,7 +4557,7 @@
       </p:sp>
       <p:sp>
         <p:nvSpPr>
-          <p:cNvPr id="30" name="Rectangle 29"/>
+          <p:cNvPr id="29" name="Rectangle 28"/>
           <p:cNvSpPr/>
           <p:nvPr/>
         </p:nvSpPr>
@@ -4621,7 +4598,7 @@
       </p:sp>
       <p:sp>
         <p:nvSpPr>
-          <p:cNvPr id="31" name="TextBox 30"/>
+          <p:cNvPr id="30" name="TextBox 29"/>
           <p:cNvSpPr txBox="1"/>
           <p:nvPr/>
         </p:nvSpPr>
@@ -4663,7 +4640,7 @@
       </p:sp>
       <p:sp>
         <p:nvSpPr>
-          <p:cNvPr id="32" name="TextBox 31"/>
+          <p:cNvPr id="31" name="TextBox 30"/>
           <p:cNvSpPr txBox="1"/>
           <p:nvPr/>
         </p:nvSpPr>
@@ -4743,7 +4720,7 @@
       </p:sp>
       <p:sp>
         <p:nvSpPr>
-          <p:cNvPr id="33" name="Rectangle 32"/>
+          <p:cNvPr id="32" name="Rectangle 31"/>
           <p:cNvSpPr/>
           <p:nvPr/>
         </p:nvSpPr>
@@ -4786,7 +4763,7 @@
       </p:sp>
       <p:sp>
         <p:nvSpPr>
-          <p:cNvPr id="34" name="Rectangle 33"/>
+          <p:cNvPr id="33" name="Rectangle 32"/>
           <p:cNvSpPr/>
           <p:nvPr/>
         </p:nvSpPr>
@@ -4827,7 +4804,7 @@
       </p:sp>
       <p:sp>
         <p:nvSpPr>
-          <p:cNvPr id="35" name="Rectangle 34"/>
+          <p:cNvPr id="34" name="Rectangle 33"/>
           <p:cNvSpPr/>
           <p:nvPr/>
         </p:nvSpPr>
@@ -4868,7 +4845,7 @@
       </p:sp>
       <p:sp>
         <p:nvSpPr>
-          <p:cNvPr id="36" name="TextBox 35"/>
+          <p:cNvPr id="35" name="TextBox 34"/>
           <p:cNvSpPr txBox="1"/>
           <p:nvPr/>
         </p:nvSpPr>
@@ -4910,7 +4887,7 @@
       </p:sp>
       <p:sp>
         <p:nvSpPr>
-          <p:cNvPr id="37" name="TextBox 36"/>
+          <p:cNvPr id="36" name="TextBox 35"/>
           <p:cNvSpPr txBox="1"/>
           <p:nvPr/>
         </p:nvSpPr>
@@ -4990,7 +4967,7 @@
       </p:sp>
       <p:sp>
         <p:nvSpPr>
-          <p:cNvPr id="38" name="Rectangle 37"/>
+          <p:cNvPr id="37" name="Rectangle 36"/>
           <p:cNvSpPr/>
           <p:nvPr/>
         </p:nvSpPr>
@@ -5033,7 +5010,7 @@
       </p:sp>
       <p:sp>
         <p:nvSpPr>
-          <p:cNvPr id="39" name="Rectangle 38"/>
+          <p:cNvPr id="38" name="Rectangle 37"/>
           <p:cNvSpPr/>
           <p:nvPr/>
         </p:nvSpPr>
@@ -5074,7 +5051,7 @@
       </p:sp>
       <p:sp>
         <p:nvSpPr>
-          <p:cNvPr id="40" name="Rectangle 39"/>
+          <p:cNvPr id="39" name="Rectangle 38"/>
           <p:cNvSpPr/>
           <p:nvPr/>
         </p:nvSpPr>
@@ -5115,7 +5092,7 @@
       </p:sp>
       <p:sp>
         <p:nvSpPr>
-          <p:cNvPr id="41" name="TextBox 40"/>
+          <p:cNvPr id="40" name="TextBox 39"/>
           <p:cNvSpPr txBox="1"/>
           <p:nvPr/>
         </p:nvSpPr>
@@ -5157,7 +5134,7 @@
       </p:sp>
       <p:sp>
         <p:nvSpPr>
-          <p:cNvPr id="42" name="TextBox 41"/>
+          <p:cNvPr id="41" name="TextBox 40"/>
           <p:cNvSpPr txBox="1"/>
           <p:nvPr/>
         </p:nvSpPr>
@@ -5237,7 +5214,7 @@
       </p:sp>
       <p:sp>
         <p:nvSpPr>
-          <p:cNvPr id="43" name="Rectangle 42"/>
+          <p:cNvPr id="42" name="Rectangle 41"/>
           <p:cNvSpPr/>
           <p:nvPr/>
         </p:nvSpPr>
@@ -5280,7 +5257,7 @@
       </p:sp>
       <p:sp>
         <p:nvSpPr>
-          <p:cNvPr id="44" name="Rectangle 43"/>
+          <p:cNvPr id="43" name="Rectangle 42"/>
           <p:cNvSpPr/>
           <p:nvPr/>
         </p:nvSpPr>
@@ -5321,7 +5298,7 @@
       </p:sp>
       <p:sp>
         <p:nvSpPr>
-          <p:cNvPr id="45" name="Rectangle 44"/>
+          <p:cNvPr id="44" name="Rectangle 43"/>
           <p:cNvSpPr/>
           <p:nvPr/>
         </p:nvSpPr>
@@ -5362,7 +5339,7 @@
       </p:sp>
       <p:sp>
         <p:nvSpPr>
-          <p:cNvPr id="46" name="TextBox 45"/>
+          <p:cNvPr id="45" name="TextBox 44"/>
           <p:cNvSpPr txBox="1"/>
           <p:nvPr/>
         </p:nvSpPr>
@@ -5404,7 +5381,7 @@
       </p:sp>
       <p:sp>
         <p:nvSpPr>
-          <p:cNvPr id="47" name="TextBox 46"/>
+          <p:cNvPr id="46" name="TextBox 45"/>
           <p:cNvSpPr txBox="1"/>
           <p:nvPr/>
         </p:nvSpPr>
@@ -5484,7 +5461,7 @@
       </p:sp>
       <p:sp>
         <p:nvSpPr>
-          <p:cNvPr id="48" name="Rectangle 47"/>
+          <p:cNvPr id="47" name="Rectangle 46"/>
           <p:cNvSpPr/>
           <p:nvPr/>
         </p:nvSpPr>
@@ -5527,7 +5504,7 @@
       </p:sp>
       <p:sp>
         <p:nvSpPr>
-          <p:cNvPr id="49" name="Rectangle 48"/>
+          <p:cNvPr id="48" name="Rectangle 47"/>
           <p:cNvSpPr/>
           <p:nvPr/>
         </p:nvSpPr>
@@ -5568,7 +5545,7 @@
       </p:sp>
       <p:sp>
         <p:nvSpPr>
-          <p:cNvPr id="50" name="Rectangle 49"/>
+          <p:cNvPr id="49" name="Rectangle 48"/>
           <p:cNvSpPr/>
           <p:nvPr/>
         </p:nvSpPr>
@@ -5609,7 +5586,7 @@
       </p:sp>
       <p:sp>
         <p:nvSpPr>
-          <p:cNvPr id="51" name="TextBox 50"/>
+          <p:cNvPr id="50" name="TextBox 49"/>
           <p:cNvSpPr txBox="1"/>
           <p:nvPr/>
         </p:nvSpPr>
@@ -5651,7 +5628,7 @@
       </p:sp>
       <p:sp>
         <p:nvSpPr>
-          <p:cNvPr id="52" name="TextBox 51"/>
+          <p:cNvPr id="51" name="TextBox 50"/>
           <p:cNvSpPr txBox="1"/>
           <p:nvPr/>
         </p:nvSpPr>
@@ -5742,9 +5719,12 @@
   <p:cSld>
     <p:bg>
       <p:bgPr>
-        <a:solidFill>
-          <a:srgbClr val="FFFFFF"/>
-        </a:solidFill>
+        <a:blipFill>
+          <a:blip r:embed="rId2"/>
+          <a:stretch>
+            <a:fillRect/>
+          </a:stretch>
+        </a:blipFill>
         <a:effectLst/>
       </p:bgPr>
     </p:bg>
@@ -5755,35 +5735,9 @@
         <p:nvPr/>
       </p:nvGrpSpPr>
       <p:grpSpPr/>
-      <p:pic>
-        <p:nvPicPr>
-          <p:cNvPr id="2" name="Picture 1" descr="bg-p2.png"/>
-          <p:cNvPicPr>
-            <a:picLocks noChangeAspect="1"/>
-          </p:cNvPicPr>
-          <p:nvPr/>
-        </p:nvPicPr>
-        <p:blipFill>
-          <a:blip r:embed="rId2">
-            <a:alphaModFix amt="80000"/>
-          </a:blip>
-          <a:stretch>
-            <a:fillRect/>
-          </a:stretch>
-        </p:blipFill>
-        <p:spPr>
-          <a:xfrm>
-            <a:off x="0" y="0"/>
-            <a:ext cx="7556399" cy="10692000"/>
-          </a:xfrm>
-          <a:prstGeom prst="rect">
-            <a:avLst/>
-          </a:prstGeom>
-        </p:spPr>
-      </p:pic>
-      <p:sp>
-        <p:nvSpPr>
-          <p:cNvPr id="3" name="Rectangle 2"/>
+      <p:sp>
+        <p:nvSpPr>
+          <p:cNvPr id="2" name="Rectangle 1"/>
           <p:cNvSpPr/>
           <p:nvPr/>
         </p:nvSpPr>
@@ -5826,7 +5780,7 @@
       </p:sp>
       <p:sp>
         <p:nvSpPr>
-          <p:cNvPr id="4" name="Rectangle 3"/>
+          <p:cNvPr id="3" name="Rectangle 2"/>
           <p:cNvSpPr/>
           <p:nvPr/>
         </p:nvSpPr>
@@ -5867,7 +5821,7 @@
       </p:sp>
       <p:sp>
         <p:nvSpPr>
-          <p:cNvPr id="5" name="Rectangle 4"/>
+          <p:cNvPr id="4" name="Rectangle 3"/>
           <p:cNvSpPr/>
           <p:nvPr/>
         </p:nvSpPr>
@@ -5908,7 +5862,7 @@
       </p:sp>
       <p:sp>
         <p:nvSpPr>
-          <p:cNvPr id="6" name="TextBox 5"/>
+          <p:cNvPr id="5" name="TextBox 4"/>
           <p:cNvSpPr txBox="1"/>
           <p:nvPr/>
         </p:nvSpPr>
@@ -5950,7 +5904,7 @@
       </p:sp>
       <p:sp>
         <p:nvSpPr>
-          <p:cNvPr id="7" name="TextBox 6"/>
+          <p:cNvPr id="6" name="TextBox 5"/>
           <p:cNvSpPr txBox="1"/>
           <p:nvPr/>
         </p:nvSpPr>
@@ -6030,7 +5984,7 @@
       </p:sp>
       <p:sp>
         <p:nvSpPr>
-          <p:cNvPr id="8" name="Rectangle 7"/>
+          <p:cNvPr id="7" name="Rectangle 6"/>
           <p:cNvSpPr/>
           <p:nvPr/>
         </p:nvSpPr>
@@ -6073,7 +6027,7 @@
       </p:sp>
       <p:sp>
         <p:nvSpPr>
-          <p:cNvPr id="9" name="Rectangle 8"/>
+          <p:cNvPr id="8" name="Rectangle 7"/>
           <p:cNvSpPr/>
           <p:nvPr/>
         </p:nvSpPr>
@@ -6114,7 +6068,7 @@
       </p:sp>
       <p:sp>
         <p:nvSpPr>
-          <p:cNvPr id="10" name="Rectangle 9"/>
+          <p:cNvPr id="9" name="Rectangle 8"/>
           <p:cNvSpPr/>
           <p:nvPr/>
         </p:nvSpPr>
@@ -6155,7 +6109,7 @@
       </p:sp>
       <p:sp>
         <p:nvSpPr>
-          <p:cNvPr id="11" name="TextBox 10"/>
+          <p:cNvPr id="10" name="TextBox 9"/>
           <p:cNvSpPr txBox="1"/>
           <p:nvPr/>
         </p:nvSpPr>
@@ -6197,7 +6151,7 @@
       </p:sp>
       <p:sp>
         <p:nvSpPr>
-          <p:cNvPr id="12" name="TextBox 11"/>
+          <p:cNvPr id="11" name="TextBox 10"/>
           <p:cNvSpPr txBox="1"/>
           <p:nvPr/>
         </p:nvSpPr>
@@ -6277,7 +6231,7 @@
       </p:sp>
       <p:sp>
         <p:nvSpPr>
-          <p:cNvPr id="13" name="Rectangle 12"/>
+          <p:cNvPr id="12" name="Rectangle 11"/>
           <p:cNvSpPr/>
           <p:nvPr/>
         </p:nvSpPr>
@@ -6320,7 +6274,7 @@
       </p:sp>
       <p:sp>
         <p:nvSpPr>
-          <p:cNvPr id="14" name="Rectangle 13"/>
+          <p:cNvPr id="13" name="Rectangle 12"/>
           <p:cNvSpPr/>
           <p:nvPr/>
         </p:nvSpPr>
@@ -6361,7 +6315,7 @@
       </p:sp>
       <p:sp>
         <p:nvSpPr>
-          <p:cNvPr id="15" name="Rectangle 14"/>
+          <p:cNvPr id="14" name="Rectangle 13"/>
           <p:cNvSpPr/>
           <p:nvPr/>
         </p:nvSpPr>
@@ -6402,7 +6356,7 @@
       </p:sp>
       <p:sp>
         <p:nvSpPr>
-          <p:cNvPr id="16" name="TextBox 15"/>
+          <p:cNvPr id="15" name="TextBox 14"/>
           <p:cNvSpPr txBox="1"/>
           <p:nvPr/>
         </p:nvSpPr>
@@ -6444,7 +6398,7 @@
       </p:sp>
       <p:sp>
         <p:nvSpPr>
-          <p:cNvPr id="17" name="TextBox 16"/>
+          <p:cNvPr id="16" name="TextBox 15"/>
           <p:cNvSpPr txBox="1"/>
           <p:nvPr/>
         </p:nvSpPr>
@@ -6524,7 +6478,7 @@
       </p:sp>
       <p:sp>
         <p:nvSpPr>
-          <p:cNvPr id="18" name="Rectangle 17"/>
+          <p:cNvPr id="17" name="Rectangle 16"/>
           <p:cNvSpPr/>
           <p:nvPr/>
         </p:nvSpPr>
@@ -6567,7 +6521,7 @@
       </p:sp>
       <p:sp>
         <p:nvSpPr>
-          <p:cNvPr id="19" name="Rectangle 18"/>
+          <p:cNvPr id="18" name="Rectangle 17"/>
           <p:cNvSpPr/>
           <p:nvPr/>
         </p:nvSpPr>
@@ -6608,7 +6562,7 @@
       </p:sp>
       <p:sp>
         <p:nvSpPr>
-          <p:cNvPr id="20" name="Rectangle 19"/>
+          <p:cNvPr id="19" name="Rectangle 18"/>
           <p:cNvSpPr/>
           <p:nvPr/>
         </p:nvSpPr>
@@ -6649,7 +6603,7 @@
       </p:sp>
       <p:sp>
         <p:nvSpPr>
-          <p:cNvPr id="21" name="TextBox 20"/>
+          <p:cNvPr id="20" name="TextBox 19"/>
           <p:cNvSpPr txBox="1"/>
           <p:nvPr/>
         </p:nvSpPr>
@@ -6691,7 +6645,7 @@
       </p:sp>
       <p:sp>
         <p:nvSpPr>
-          <p:cNvPr id="22" name="TextBox 21"/>
+          <p:cNvPr id="21" name="TextBox 20"/>
           <p:cNvSpPr txBox="1"/>
           <p:nvPr/>
         </p:nvSpPr>
@@ -6771,7 +6725,7 @@
       </p:sp>
       <p:sp>
         <p:nvSpPr>
-          <p:cNvPr id="23" name="Rectangle 22"/>
+          <p:cNvPr id="22" name="Rectangle 21"/>
           <p:cNvSpPr/>
           <p:nvPr/>
         </p:nvSpPr>
@@ -6814,7 +6768,7 @@
       </p:sp>
       <p:sp>
         <p:nvSpPr>
-          <p:cNvPr id="24" name="Rectangle 23"/>
+          <p:cNvPr id="23" name="Rectangle 22"/>
           <p:cNvSpPr/>
           <p:nvPr/>
         </p:nvSpPr>
@@ -6855,7 +6809,7 @@
       </p:sp>
       <p:sp>
         <p:nvSpPr>
-          <p:cNvPr id="25" name="Rectangle 24"/>
+          <p:cNvPr id="24" name="Rectangle 23"/>
           <p:cNvSpPr/>
           <p:nvPr/>
         </p:nvSpPr>
@@ -6896,7 +6850,7 @@
       </p:sp>
       <p:sp>
         <p:nvSpPr>
-          <p:cNvPr id="26" name="TextBox 25"/>
+          <p:cNvPr id="25" name="TextBox 24"/>
           <p:cNvSpPr txBox="1"/>
           <p:nvPr/>
         </p:nvSpPr>
@@ -6938,7 +6892,7 @@
       </p:sp>
       <p:sp>
         <p:nvSpPr>
-          <p:cNvPr id="27" name="TextBox 26"/>
+          <p:cNvPr id="26" name="TextBox 25"/>
           <p:cNvSpPr txBox="1"/>
           <p:nvPr/>
         </p:nvSpPr>
@@ -7018,7 +6972,7 @@
       </p:sp>
       <p:sp>
         <p:nvSpPr>
-          <p:cNvPr id="28" name="Rectangle 27"/>
+          <p:cNvPr id="27" name="Rectangle 26"/>
           <p:cNvSpPr/>
           <p:nvPr/>
         </p:nvSpPr>
@@ -7059,7 +7013,7 @@
       </p:sp>
       <p:sp>
         <p:nvSpPr>
-          <p:cNvPr id="29" name="TextBox 28"/>
+          <p:cNvPr id="28" name="TextBox 27"/>
           <p:cNvSpPr txBox="1"/>
           <p:nvPr/>
         </p:nvSpPr>
